--- a/20261027_LINEログイン・Profile+のご提案ver1.0.pptx
+++ b/20261027_LINEログイン・Profile+のご提案ver1.0.pptx
@@ -3855,7 +3855,7 @@
                 <a:ea typeface="メイリオ"/>
                 <a:cs typeface="メイリオ"/>
               </a:rPr>
-              <a:t>連絡が届きにくい</a:t>
+              <a:t>接点が切れやすい</a:t>
             </a:r>
           </a:p>
           <a:p>
@@ -3876,7 +3876,8 @@
                 <a:ea typeface="メイリオ"/>
                 <a:cs typeface="メイリオ"/>
               </a:rPr>
-              <a:t>メルマガ等の開封率が下がり、追客が続かない</a:t>
+              <a:t>予約・購入の後の
+ご案内が届きにくい</a:t>
             </a:r>
           </a:p>
         </p:txBody>

--- a/20261027_LINEログイン・Profile+のご提案ver1.0.pptx
+++ b/20261027_LINEログイン・Profile+のご提案ver1.0.pptx
@@ -5707,7 +5707,7 @@
         </p:nvSpPr>
         <p:spPr>
           <a:xfrm>
-            <a:off x="648000" y="2117999"/>
+            <a:off x="648000" y="1799999"/>
             <a:ext cx="432000" cy="432000"/>
           </a:xfrm>
           <a:prstGeom prst="ellipse">
@@ -5769,7 +5769,7 @@
         </p:nvSpPr>
         <p:spPr>
           <a:xfrm>
-            <a:off x="1224000" y="1992000"/>
+            <a:off x="1224000" y="1674000"/>
             <a:ext cx="4536000" cy="720000"/>
           </a:xfrm>
           <a:prstGeom prst="rect">
@@ -5834,8 +5834,8 @@
         </p:nvCxnSpPr>
         <p:spPr>
           <a:xfrm>
-            <a:off x="864000" y="2586000"/>
-            <a:ext cx="0" cy="396000"/>
+            <a:off x="864000" y="2267999"/>
+            <a:ext cx="0" cy="216001"/>
           </a:xfrm>
           <a:prstGeom prst="line">
             <a:avLst/>
@@ -5870,7 +5870,7 @@
         </p:nvSpPr>
         <p:spPr>
           <a:xfrm>
-            <a:off x="648000" y="3126000"/>
+            <a:off x="648000" y="2627999"/>
             <a:ext cx="432000" cy="432000"/>
           </a:xfrm>
           <a:prstGeom prst="ellipse">
@@ -5932,7 +5932,7 @@
         </p:nvSpPr>
         <p:spPr>
           <a:xfrm>
-            <a:off x="1224000" y="3000000"/>
+            <a:off x="1224000" y="2502000"/>
             <a:ext cx="4536000" cy="720000"/>
           </a:xfrm>
           <a:prstGeom prst="rect">
@@ -5997,8 +5997,8 @@
         </p:nvCxnSpPr>
         <p:spPr>
           <a:xfrm>
-            <a:off x="864000" y="3593999"/>
-            <a:ext cx="0" cy="396001"/>
+            <a:off x="864000" y="3096000"/>
+            <a:ext cx="0" cy="216000"/>
           </a:xfrm>
           <a:prstGeom prst="line">
             <a:avLst/>
@@ -6033,7 +6033,7 @@
         </p:nvSpPr>
         <p:spPr>
           <a:xfrm>
-            <a:off x="648000" y="4133999"/>
+            <a:off x="648000" y="3456000"/>
             <a:ext cx="432000" cy="432000"/>
           </a:xfrm>
           <a:prstGeom prst="ellipse">
@@ -6095,7 +6095,7 @@
         </p:nvSpPr>
         <p:spPr>
           <a:xfrm>
-            <a:off x="1224000" y="4008000"/>
+            <a:off x="1224000" y="3330000"/>
             <a:ext cx="4536000" cy="720000"/>
           </a:xfrm>
           <a:prstGeom prst="rect">
@@ -6160,8 +6160,8 @@
         </p:nvSpPr>
         <p:spPr>
           <a:xfrm>
-            <a:off x="5976000" y="2027999"/>
-            <a:ext cx="3276000" cy="2628000"/>
+            <a:off x="5976000" y="1710000"/>
+            <a:ext cx="3276000" cy="2304000"/>
           </a:xfrm>
           <a:prstGeom prst="roundRect">
             <a:avLst>
@@ -6209,7 +6209,7 @@
         </p:nvSpPr>
         <p:spPr>
           <a:xfrm>
-            <a:off x="6120000" y="2873999"/>
+            <a:off x="6120000" y="2394000"/>
             <a:ext cx="936000" cy="936000"/>
           </a:xfrm>
           <a:prstGeom prst="rect">
@@ -6273,7 +6273,7 @@
         </p:nvSpPr>
         <p:spPr>
           <a:xfrm>
-            <a:off x="7164000" y="2946000"/>
+            <a:off x="7164000" y="2466000"/>
             <a:ext cx="1980000" cy="792000"/>
           </a:xfrm>
           <a:prstGeom prst="rect">
@@ -6359,8 +6359,8 @@
         </p:nvSpPr>
         <p:spPr>
           <a:xfrm>
-            <a:off x="648000" y="5016000"/>
-            <a:ext cx="8604000" cy="576000"/>
+            <a:off x="648000" y="4157999"/>
+            <a:ext cx="8604000" cy="540000"/>
           </a:xfrm>
           <a:prstGeom prst="rect">
             <a:avLst/>
@@ -6434,6 +6434,391 @@
           </a:p>
         </p:txBody>
       </p:sp>
+      <p:sp>
+        <p:nvSpPr>
+          <p:cNvPr id="18" name="TextBox 17"/>
+          <p:cNvSpPr txBox="1"/>
+          <p:nvPr/>
+        </p:nvSpPr>
+        <p:spPr>
+          <a:xfrm>
+            <a:off x="648000" y="4878000"/>
+            <a:ext cx="8604000" cy="251999"/>
+          </a:xfrm>
+          <a:prstGeom prst="rect">
+            <a:avLst/>
+          </a:prstGeom>
+          <a:noFill/>
+        </p:spPr>
+        <p:txBody>
+          <a:bodyPr wrap="square" anchor="t" lIns="36000" rIns="36000" tIns="18000" bIns="18000">
+            <a:spAutoFit/>
+          </a:bodyPr>
+          <a:lstStyle/>
+          <a:p>
+            <a:pPr algn="l">
+              <a:lnSpc>
+                <a:spcPct val="110000"/>
+              </a:lnSpc>
+              <a:spcAft>
+                <a:spcPts val="0"/>
+              </a:spcAft>
+            </a:pPr>
+            <a:r>
+              <a:rPr sz="1200" b="1">
+                <a:solidFill>
+                  <a:srgbClr val="1F285A"/>
+                </a:solidFill>
+                <a:latin typeface="メイリオ"/>
+                <a:ea typeface="メイリオ"/>
+                <a:cs typeface="メイリオ"/>
+              </a:rPr>
+              <a:t>実例｜コンタクトレンズ・メガネのEC</a:t>
+            </a:r>
+          </a:p>
+        </p:txBody>
+      </p:sp>
+      <p:sp>
+        <p:nvSpPr>
+          <p:cNvPr id="19" name="TextBox 18"/>
+          <p:cNvSpPr txBox="1"/>
+          <p:nvPr/>
+        </p:nvSpPr>
+        <p:spPr>
+          <a:xfrm>
+            <a:off x="648000" y="5112000"/>
+            <a:ext cx="8604000" cy="216000"/>
+          </a:xfrm>
+          <a:prstGeom prst="rect">
+            <a:avLst/>
+          </a:prstGeom>
+          <a:noFill/>
+        </p:spPr>
+        <p:txBody>
+          <a:bodyPr wrap="square" anchor="t" lIns="36000" rIns="36000" tIns="18000" bIns="18000">
+            <a:spAutoFit/>
+          </a:bodyPr>
+          <a:lstStyle/>
+          <a:p>
+            <a:pPr algn="l">
+              <a:lnSpc>
+                <a:spcPct val="110000"/>
+              </a:lnSpc>
+              <a:spcAft>
+                <a:spcPts val="0"/>
+              </a:spcAft>
+            </a:pPr>
+            <a:r>
+              <a:rPr sz="1000" b="0">
+                <a:solidFill>
+                  <a:srgbClr val="333333"/>
+                </a:solidFill>
+                <a:latin typeface="メイリオ"/>
+                <a:ea typeface="メイリオ"/>
+                <a:cs typeface="メイリオ"/>
+              </a:rPr>
+              <a:t>会員サイトのログインに「LINEでログイン」を追加し、会員情報とLINEを連携</a:t>
+            </a:r>
+          </a:p>
+        </p:txBody>
+      </p:sp>
+      <p:sp>
+        <p:nvSpPr>
+          <p:cNvPr id="20" name="Rectangle 19"/>
+          <p:cNvSpPr/>
+          <p:nvPr/>
+        </p:nvSpPr>
+        <p:spPr>
+          <a:xfrm>
+            <a:off x="648000" y="5364000"/>
+            <a:ext cx="8604000" cy="720000"/>
+          </a:xfrm>
+          <a:prstGeom prst="rect">
+            <a:avLst/>
+          </a:prstGeom>
+          <a:solidFill>
+            <a:srgbClr val="F2F2F2"/>
+          </a:solidFill>
+          <a:ln>
+            <a:noFill/>
+          </a:ln>
+          <a:effectLst/>
+        </p:spPr>
+        <p:style>
+          <a:lnRef idx="1">
+            <a:schemeClr val="accent1"/>
+          </a:lnRef>
+          <a:fillRef idx="3">
+            <a:schemeClr val="accent1"/>
+          </a:fillRef>
+          <a:effectRef idx="0">
+            <a:schemeClr val="accent1"/>
+          </a:effectRef>
+          <a:fontRef idx="minor">
+            <a:schemeClr val="lt1"/>
+          </a:fontRef>
+        </p:style>
+        <p:txBody>
+          <a:bodyPr rtlCol="0" anchor="ctr" wrap="square" lIns="72000" tIns="18000" rIns="72000" bIns="18000"/>
+          <a:lstStyle/>
+          <a:p>
+            <a:pPr algn="ctr"/>
+          </a:p>
+        </p:txBody>
+      </p:sp>
+      <p:sp>
+        <p:nvSpPr>
+          <p:cNvPr id="21" name="TextBox 20"/>
+          <p:cNvSpPr txBox="1"/>
+          <p:nvPr/>
+        </p:nvSpPr>
+        <p:spPr>
+          <a:xfrm>
+            <a:off x="648000" y="5399999"/>
+            <a:ext cx="4302000" cy="342000"/>
+          </a:xfrm>
+          <a:prstGeom prst="rect">
+            <a:avLst/>
+          </a:prstGeom>
+          <a:noFill/>
+        </p:spPr>
+        <p:txBody>
+          <a:bodyPr wrap="square" anchor="ctr" lIns="36000" rIns="36000" tIns="18000" bIns="18000">
+            <a:spAutoFit/>
+          </a:bodyPr>
+          <a:lstStyle/>
+          <a:p>
+            <a:pPr algn="ctr">
+              <a:lnSpc>
+                <a:spcPct val="110000"/>
+              </a:lnSpc>
+              <a:spcAft>
+                <a:spcPts val="0"/>
+              </a:spcAft>
+            </a:pPr>
+            <a:r>
+              <a:rPr sz="2000" b="1">
+                <a:solidFill>
+                  <a:srgbClr val="1F285A"/>
+                </a:solidFill>
+                <a:latin typeface="メイリオ"/>
+                <a:ea typeface="メイリオ"/>
+                <a:cs typeface="メイリオ"/>
+              </a:rPr>
+              <a:t>約70%</a:t>
+            </a:r>
+          </a:p>
+        </p:txBody>
+      </p:sp>
+      <p:sp>
+        <p:nvSpPr>
+          <p:cNvPr id="22" name="TextBox 21"/>
+          <p:cNvSpPr txBox="1"/>
+          <p:nvPr/>
+        </p:nvSpPr>
+        <p:spPr>
+          <a:xfrm>
+            <a:off x="648000" y="5724000"/>
+            <a:ext cx="4302000" cy="342000"/>
+          </a:xfrm>
+          <a:prstGeom prst="rect">
+            <a:avLst/>
+          </a:prstGeom>
+          <a:noFill/>
+        </p:spPr>
+        <p:txBody>
+          <a:bodyPr wrap="square" anchor="t" lIns="36000" rIns="36000" tIns="18000" bIns="18000">
+            <a:spAutoFit/>
+          </a:bodyPr>
+          <a:lstStyle/>
+          <a:p>
+            <a:pPr algn="ctr">
+              <a:lnSpc>
+                <a:spcPct val="110000"/>
+              </a:lnSpc>
+              <a:spcAft>
+                <a:spcPts val="0"/>
+              </a:spcAft>
+            </a:pPr>
+            <a:r>
+              <a:rPr sz="950" b="0">
+                <a:solidFill>
+                  <a:srgbClr val="333333"/>
+                </a:solidFill>
+                <a:latin typeface="メイリオ"/>
+                <a:ea typeface="メイリオ"/>
+                <a:cs typeface="メイリオ"/>
+              </a:rPr>
+              <a:t>新規友だちのうち、</a:t>
+            </a:r>
+          </a:p>
+          <a:p>
+            <a:pPr algn="ctr">
+              <a:lnSpc>
+                <a:spcPct val="110000"/>
+              </a:lnSpc>
+              <a:spcAft>
+                <a:spcPts val="0"/>
+              </a:spcAft>
+            </a:pPr>
+            <a:r>
+              <a:rPr sz="950" b="0">
+                <a:solidFill>
+                  <a:srgbClr val="333333"/>
+                </a:solidFill>
+                <a:latin typeface="メイリオ"/>
+                <a:ea typeface="メイリオ"/>
+                <a:cs typeface="メイリオ"/>
+              </a:rPr>
+              <a:t>LINEログイン経由で追加した割合</a:t>
+            </a:r>
+          </a:p>
+        </p:txBody>
+      </p:sp>
+      <p:sp>
+        <p:nvSpPr>
+          <p:cNvPr id="23" name="TextBox 22"/>
+          <p:cNvSpPr txBox="1"/>
+          <p:nvPr/>
+        </p:nvSpPr>
+        <p:spPr>
+          <a:xfrm>
+            <a:off x="4950000" y="5399999"/>
+            <a:ext cx="4302000" cy="342000"/>
+          </a:xfrm>
+          <a:prstGeom prst="rect">
+            <a:avLst/>
+          </a:prstGeom>
+          <a:noFill/>
+        </p:spPr>
+        <p:txBody>
+          <a:bodyPr wrap="square" anchor="ctr" lIns="36000" rIns="36000" tIns="18000" bIns="18000">
+            <a:spAutoFit/>
+          </a:bodyPr>
+          <a:lstStyle/>
+          <a:p>
+            <a:pPr algn="ctr">
+              <a:lnSpc>
+                <a:spcPct val="110000"/>
+              </a:lnSpc>
+              <a:spcAft>
+                <a:spcPts val="0"/>
+              </a:spcAft>
+            </a:pPr>
+            <a:r>
+              <a:rPr sz="2000" b="1">
+                <a:solidFill>
+                  <a:srgbClr val="1F285A"/>
+                </a:solidFill>
+                <a:latin typeface="メイリオ"/>
+                <a:ea typeface="メイリオ"/>
+                <a:cs typeface="メイリオ"/>
+              </a:rPr>
+              <a:t>約250%増</a:t>
+            </a:r>
+          </a:p>
+        </p:txBody>
+      </p:sp>
+      <p:sp>
+        <p:nvSpPr>
+          <p:cNvPr id="24" name="TextBox 23"/>
+          <p:cNvSpPr txBox="1"/>
+          <p:nvPr/>
+        </p:nvSpPr>
+        <p:spPr>
+          <a:xfrm>
+            <a:off x="4950000" y="5724000"/>
+            <a:ext cx="4302000" cy="342000"/>
+          </a:xfrm>
+          <a:prstGeom prst="rect">
+            <a:avLst/>
+          </a:prstGeom>
+          <a:noFill/>
+        </p:spPr>
+        <p:txBody>
+          <a:bodyPr wrap="square" anchor="t" lIns="36000" rIns="36000" tIns="18000" bIns="18000">
+            <a:spAutoFit/>
+          </a:bodyPr>
+          <a:lstStyle/>
+          <a:p>
+            <a:pPr algn="ctr">
+              <a:lnSpc>
+                <a:spcPct val="110000"/>
+              </a:lnSpc>
+              <a:spcAft>
+                <a:spcPts val="0"/>
+              </a:spcAft>
+            </a:pPr>
+            <a:r>
+              <a:rPr sz="950" b="0">
+                <a:solidFill>
+                  <a:srgbClr val="333333"/>
+                </a:solidFill>
+                <a:latin typeface="メイリオ"/>
+                <a:ea typeface="メイリオ"/>
+                <a:cs typeface="メイリオ"/>
+              </a:rPr>
+              <a:t>月間の新規友だち追加数</a:t>
+            </a:r>
+          </a:p>
+          <a:p>
+            <a:pPr algn="ctr">
+              <a:lnSpc>
+                <a:spcPct val="110000"/>
+              </a:lnSpc>
+              <a:spcAft>
+                <a:spcPts val="0"/>
+              </a:spcAft>
+            </a:pPr>
+            <a:r>
+              <a:rPr sz="950" b="0">
+                <a:solidFill>
+                  <a:srgbClr val="333333"/>
+                </a:solidFill>
+                <a:latin typeface="メイリオ"/>
+                <a:ea typeface="メイリオ"/>
+                <a:cs typeface="メイリオ"/>
+              </a:rPr>
+              <a:t>（約1,000人 → 約3,500人）</a:t>
+            </a:r>
+          </a:p>
+        </p:txBody>
+      </p:sp>
+      <p:cxnSp>
+        <p:nvCxnSpPr>
+          <p:cNvPr id="25" name="Connector 24"/>
+          <p:cNvCxnSpPr/>
+          <p:nvPr/>
+        </p:nvCxnSpPr>
+        <p:spPr>
+          <a:xfrm>
+            <a:off x="4950000" y="5472000"/>
+            <a:ext cx="0" cy="503999"/>
+          </a:xfrm>
+          <a:prstGeom prst="line">
+            <a:avLst/>
+          </a:prstGeom>
+          <a:ln w="9525">
+            <a:solidFill>
+              <a:srgbClr val="D9D9D9"/>
+            </a:solidFill>
+          </a:ln>
+        </p:spPr>
+        <p:style>
+          <a:lnRef idx="2">
+            <a:schemeClr val="accent1"/>
+          </a:lnRef>
+          <a:fillRef idx="0">
+            <a:schemeClr val="accent1"/>
+          </a:fillRef>
+          <a:effectRef idx="0">
+            <a:schemeClr val="accent1"/>
+          </a:effectRef>
+          <a:fontRef idx="minor">
+            <a:schemeClr val="tx1"/>
+          </a:fontRef>
+        </p:style>
+      </p:cxnSp>
     </p:spTree>
   </p:cSld>
   <p:clrMapOvr>
@@ -6825,7 +7210,7 @@
         </p:nvSpPr>
         <p:spPr>
           <a:xfrm>
-            <a:off x="648000" y="2099999"/>
+            <a:off x="648000" y="1655999"/>
             <a:ext cx="2520000" cy="864000"/>
           </a:xfrm>
           <a:prstGeom prst="roundRect">
@@ -6912,7 +7297,7 @@
         </p:nvSpPr>
         <p:spPr>
           <a:xfrm>
-            <a:off x="3690000" y="2226000"/>
+            <a:off x="3690000" y="1782000"/>
             <a:ext cx="2520000" cy="612000"/>
           </a:xfrm>
           <a:prstGeom prst="roundRect">
@@ -6976,7 +7361,7 @@
         </p:nvSpPr>
         <p:spPr>
           <a:xfrm>
-            <a:off x="6732000" y="2099999"/>
+            <a:off x="6732000" y="1655999"/>
             <a:ext cx="2520000" cy="864000"/>
           </a:xfrm>
           <a:prstGeom prst="roundRect">
@@ -7063,7 +7448,7 @@
         </p:nvCxnSpPr>
         <p:spPr>
           <a:xfrm>
-            <a:off x="3204000" y="2532000"/>
+            <a:off x="3204000" y="2088000"/>
             <a:ext cx="450000" cy="0"/>
           </a:xfrm>
           <a:prstGeom prst="line">
@@ -7099,7 +7484,7 @@
         </p:nvCxnSpPr>
         <p:spPr>
           <a:xfrm>
-            <a:off x="6246000" y="2532000"/>
+            <a:off x="6246000" y="2088000"/>
             <a:ext cx="450000" cy="0"/>
           </a:xfrm>
           <a:prstGeom prst="line">
@@ -7135,7 +7520,7 @@
         </p:nvSpPr>
         <p:spPr>
           <a:xfrm>
-            <a:off x="648000" y="3180000"/>
+            <a:off x="648000" y="2736000"/>
             <a:ext cx="8604000" cy="251999"/>
           </a:xfrm>
           <a:prstGeom prst="rect">
@@ -7180,7 +7565,7 @@
           <p:nvPr/>
         </p:nvGraphicFramePr>
         <p:xfrm>
-          <a:off x="648000" y="3468000"/>
+          <a:off x="648000" y="3024000"/>
           <a:ext cx="8604000" cy="1656000"/>
         </p:xfrm>
         <a:graphic>
@@ -7465,7 +7850,7 @@
         </p:nvSpPr>
         <p:spPr>
           <a:xfrm>
-            <a:off x="648000" y="5232000"/>
+            <a:off x="648000" y="4788000"/>
             <a:ext cx="8604000" cy="216000"/>
           </a:xfrm>
           <a:prstGeom prst="rect">
@@ -7497,6 +7882,579 @@
                 <a:cs typeface="メイリオ"/>
               </a:rPr>
               <a:t>※配信には、ID連携した方が公式アカウントの友だちであることが必要</a:t>
+            </a:r>
+          </a:p>
+        </p:txBody>
+      </p:sp>
+      <p:sp>
+        <p:nvSpPr>
+          <p:cNvPr id="14" name="TextBox 13"/>
+          <p:cNvSpPr txBox="1"/>
+          <p:nvPr/>
+        </p:nvSpPr>
+        <p:spPr>
+          <a:xfrm>
+            <a:off x="648000" y="5076000"/>
+            <a:ext cx="8604000" cy="251999"/>
+          </a:xfrm>
+          <a:prstGeom prst="rect">
+            <a:avLst/>
+          </a:prstGeom>
+          <a:noFill/>
+        </p:spPr>
+        <p:txBody>
+          <a:bodyPr wrap="square" anchor="t" lIns="36000" rIns="36000" tIns="18000" bIns="18000">
+            <a:spAutoFit/>
+          </a:bodyPr>
+          <a:lstStyle/>
+          <a:p>
+            <a:pPr algn="l">
+              <a:lnSpc>
+                <a:spcPct val="110000"/>
+              </a:lnSpc>
+              <a:spcAft>
+                <a:spcPts val="0"/>
+              </a:spcAft>
+            </a:pPr>
+            <a:r>
+              <a:rPr sz="1200" b="1">
+                <a:solidFill>
+                  <a:srgbClr val="1F285A"/>
+                </a:solidFill>
+                <a:latin typeface="メイリオ"/>
+                <a:ea typeface="メイリオ"/>
+                <a:cs typeface="メイリオ"/>
+              </a:rPr>
+              <a:t>実例｜通販（EC）</a:t>
+            </a:r>
+          </a:p>
+        </p:txBody>
+      </p:sp>
+      <p:sp>
+        <p:nvSpPr>
+          <p:cNvPr id="15" name="TextBox 14"/>
+          <p:cNvSpPr txBox="1"/>
+          <p:nvPr/>
+        </p:nvSpPr>
+        <p:spPr>
+          <a:xfrm>
+            <a:off x="648000" y="5310000"/>
+            <a:ext cx="8604000" cy="216000"/>
+          </a:xfrm>
+          <a:prstGeom prst="rect">
+            <a:avLst/>
+          </a:prstGeom>
+          <a:noFill/>
+        </p:spPr>
+        <p:txBody>
+          <a:bodyPr wrap="square" anchor="t" lIns="36000" rIns="36000" tIns="18000" bIns="18000">
+            <a:spAutoFit/>
+          </a:bodyPr>
+          <a:lstStyle/>
+          <a:p>
+            <a:pPr algn="l">
+              <a:lnSpc>
+                <a:spcPct val="110000"/>
+              </a:lnSpc>
+              <a:spcAft>
+                <a:spcPts val="0"/>
+              </a:spcAft>
+            </a:pPr>
+            <a:r>
+              <a:rPr sz="1000" b="0">
+                <a:solidFill>
+                  <a:srgbClr val="333333"/>
+                </a:solidFill>
+                <a:latin typeface="メイリオ"/>
+                <a:ea typeface="メイリオ"/>
+                <a:cs typeface="メイリオ"/>
+              </a:rPr>
+              <a:t>LINEログインで会員IDとLINEを連携し、購入履歴に応じた配信・カゴ落ち防止のメッセージを配信</a:t>
+            </a:r>
+          </a:p>
+        </p:txBody>
+      </p:sp>
+      <p:sp>
+        <p:nvSpPr>
+          <p:cNvPr id="16" name="Rectangle 15"/>
+          <p:cNvSpPr/>
+          <p:nvPr/>
+        </p:nvSpPr>
+        <p:spPr>
+          <a:xfrm>
+            <a:off x="648000" y="5562000"/>
+            <a:ext cx="8604000" cy="720000"/>
+          </a:xfrm>
+          <a:prstGeom prst="rect">
+            <a:avLst/>
+          </a:prstGeom>
+          <a:solidFill>
+            <a:srgbClr val="F2F2F2"/>
+          </a:solidFill>
+          <a:ln>
+            <a:noFill/>
+          </a:ln>
+          <a:effectLst/>
+        </p:spPr>
+        <p:style>
+          <a:lnRef idx="1">
+            <a:schemeClr val="accent1"/>
+          </a:lnRef>
+          <a:fillRef idx="3">
+            <a:schemeClr val="accent1"/>
+          </a:fillRef>
+          <a:effectRef idx="0">
+            <a:schemeClr val="accent1"/>
+          </a:effectRef>
+          <a:fontRef idx="minor">
+            <a:schemeClr val="lt1"/>
+          </a:fontRef>
+        </p:style>
+        <p:txBody>
+          <a:bodyPr rtlCol="0" anchor="ctr" wrap="square" lIns="72000" tIns="18000" rIns="72000" bIns="18000"/>
+          <a:lstStyle/>
+          <a:p>
+            <a:pPr algn="ctr"/>
+          </a:p>
+        </p:txBody>
+      </p:sp>
+      <p:sp>
+        <p:nvSpPr>
+          <p:cNvPr id="17" name="TextBox 16"/>
+          <p:cNvSpPr txBox="1"/>
+          <p:nvPr/>
+        </p:nvSpPr>
+        <p:spPr>
+          <a:xfrm>
+            <a:off x="648000" y="5598000"/>
+            <a:ext cx="2867999" cy="342000"/>
+          </a:xfrm>
+          <a:prstGeom prst="rect">
+            <a:avLst/>
+          </a:prstGeom>
+          <a:noFill/>
+        </p:spPr>
+        <p:txBody>
+          <a:bodyPr wrap="square" anchor="ctr" lIns="36000" rIns="36000" tIns="18000" bIns="18000">
+            <a:spAutoFit/>
+          </a:bodyPr>
+          <a:lstStyle/>
+          <a:p>
+            <a:pPr algn="ctr">
+              <a:lnSpc>
+                <a:spcPct val="110000"/>
+              </a:lnSpc>
+              <a:spcAft>
+                <a:spcPts val="0"/>
+              </a:spcAft>
+            </a:pPr>
+            <a:r>
+              <a:rPr sz="2000" b="1">
+                <a:solidFill>
+                  <a:srgbClr val="1F285A"/>
+                </a:solidFill>
+                <a:latin typeface="メイリオ"/>
+                <a:ea typeface="メイリオ"/>
+                <a:cs typeface="メイリオ"/>
+              </a:rPr>
+              <a:t>約250%増</a:t>
+            </a:r>
+          </a:p>
+        </p:txBody>
+      </p:sp>
+      <p:sp>
+        <p:nvSpPr>
+          <p:cNvPr id="18" name="TextBox 17"/>
+          <p:cNvSpPr txBox="1"/>
+          <p:nvPr/>
+        </p:nvSpPr>
+        <p:spPr>
+          <a:xfrm>
+            <a:off x="648000" y="5922000"/>
+            <a:ext cx="2867999" cy="342000"/>
+          </a:xfrm>
+          <a:prstGeom prst="rect">
+            <a:avLst/>
+          </a:prstGeom>
+          <a:noFill/>
+        </p:spPr>
+        <p:txBody>
+          <a:bodyPr wrap="square" anchor="t" lIns="36000" rIns="36000" tIns="18000" bIns="18000">
+            <a:spAutoFit/>
+          </a:bodyPr>
+          <a:lstStyle/>
+          <a:p>
+            <a:pPr algn="ctr">
+              <a:lnSpc>
+                <a:spcPct val="110000"/>
+              </a:lnSpc>
+              <a:spcAft>
+                <a:spcPts val="0"/>
+              </a:spcAft>
+            </a:pPr>
+            <a:r>
+              <a:rPr sz="950" b="0">
+                <a:solidFill>
+                  <a:srgbClr val="333333"/>
+                </a:solidFill>
+                <a:latin typeface="メイリオ"/>
+                <a:ea typeface="メイリオ"/>
+                <a:cs typeface="メイリオ"/>
+              </a:rPr>
+              <a:t>LINE経由の</a:t>
+            </a:r>
+          </a:p>
+          <a:p>
+            <a:pPr algn="ctr">
+              <a:lnSpc>
+                <a:spcPct val="110000"/>
+              </a:lnSpc>
+              <a:spcAft>
+                <a:spcPts val="0"/>
+              </a:spcAft>
+            </a:pPr>
+            <a:r>
+              <a:rPr sz="950" b="0">
+                <a:solidFill>
+                  <a:srgbClr val="333333"/>
+                </a:solidFill>
+                <a:latin typeface="メイリオ"/>
+                <a:ea typeface="メイリオ"/>
+                <a:cs typeface="メイリオ"/>
+              </a:rPr>
+              <a:t>ECサイト新規会員登録数</a:t>
+            </a:r>
+          </a:p>
+        </p:txBody>
+      </p:sp>
+      <p:sp>
+        <p:nvSpPr>
+          <p:cNvPr id="19" name="TextBox 18"/>
+          <p:cNvSpPr txBox="1"/>
+          <p:nvPr/>
+        </p:nvSpPr>
+        <p:spPr>
+          <a:xfrm>
+            <a:off x="3515999" y="5598000"/>
+            <a:ext cx="2867999" cy="342000"/>
+          </a:xfrm>
+          <a:prstGeom prst="rect">
+            <a:avLst/>
+          </a:prstGeom>
+          <a:noFill/>
+        </p:spPr>
+        <p:txBody>
+          <a:bodyPr wrap="square" anchor="ctr" lIns="36000" rIns="36000" tIns="18000" bIns="18000">
+            <a:spAutoFit/>
+          </a:bodyPr>
+          <a:lstStyle/>
+          <a:p>
+            <a:pPr algn="ctr">
+              <a:lnSpc>
+                <a:spcPct val="110000"/>
+              </a:lnSpc>
+              <a:spcAft>
+                <a:spcPts val="0"/>
+              </a:spcAft>
+            </a:pPr>
+            <a:r>
+              <a:rPr sz="2000" b="1">
+                <a:solidFill>
+                  <a:srgbClr val="1F285A"/>
+                </a:solidFill>
+                <a:latin typeface="メイリオ"/>
+                <a:ea typeface="メイリオ"/>
+                <a:cs typeface="メイリオ"/>
+              </a:rPr>
+              <a:t>約300%増</a:t>
+            </a:r>
+          </a:p>
+        </p:txBody>
+      </p:sp>
+      <p:sp>
+        <p:nvSpPr>
+          <p:cNvPr id="20" name="TextBox 19"/>
+          <p:cNvSpPr txBox="1"/>
+          <p:nvPr/>
+        </p:nvSpPr>
+        <p:spPr>
+          <a:xfrm>
+            <a:off x="3515999" y="5922000"/>
+            <a:ext cx="2867999" cy="342000"/>
+          </a:xfrm>
+          <a:prstGeom prst="rect">
+            <a:avLst/>
+          </a:prstGeom>
+          <a:noFill/>
+        </p:spPr>
+        <p:txBody>
+          <a:bodyPr wrap="square" anchor="t" lIns="36000" rIns="36000" tIns="18000" bIns="18000">
+            <a:spAutoFit/>
+          </a:bodyPr>
+          <a:lstStyle/>
+          <a:p>
+            <a:pPr algn="ctr">
+              <a:lnSpc>
+                <a:spcPct val="110000"/>
+              </a:lnSpc>
+              <a:spcAft>
+                <a:spcPts val="0"/>
+              </a:spcAft>
+            </a:pPr>
+            <a:r>
+              <a:rPr sz="950" b="0">
+                <a:solidFill>
+                  <a:srgbClr val="333333"/>
+                </a:solidFill>
+                <a:latin typeface="メイリオ"/>
+                <a:ea typeface="メイリオ"/>
+                <a:cs typeface="メイリオ"/>
+              </a:rPr>
+              <a:t>1日あたりの</a:t>
+            </a:r>
+          </a:p>
+          <a:p>
+            <a:pPr algn="ctr">
+              <a:lnSpc>
+                <a:spcPct val="110000"/>
+              </a:lnSpc>
+              <a:spcAft>
+                <a:spcPts val="0"/>
+              </a:spcAft>
+            </a:pPr>
+            <a:r>
+              <a:rPr sz="950" b="0">
+                <a:solidFill>
+                  <a:srgbClr val="333333"/>
+                </a:solidFill>
+                <a:latin typeface="メイリオ"/>
+                <a:ea typeface="メイリオ"/>
+                <a:cs typeface="メイリオ"/>
+              </a:rPr>
+              <a:t>友だち追加数</a:t>
+            </a:r>
+          </a:p>
+        </p:txBody>
+      </p:sp>
+      <p:cxnSp>
+        <p:nvCxnSpPr>
+          <p:cNvPr id="21" name="Connector 20"/>
+          <p:cNvCxnSpPr/>
+          <p:nvPr/>
+        </p:nvCxnSpPr>
+        <p:spPr>
+          <a:xfrm>
+            <a:off x="3515999" y="5670000"/>
+            <a:ext cx="0" cy="503999"/>
+          </a:xfrm>
+          <a:prstGeom prst="line">
+            <a:avLst/>
+          </a:prstGeom>
+          <a:ln w="9525">
+            <a:solidFill>
+              <a:srgbClr val="D9D9D9"/>
+            </a:solidFill>
+          </a:ln>
+        </p:spPr>
+        <p:style>
+          <a:lnRef idx="2">
+            <a:schemeClr val="accent1"/>
+          </a:lnRef>
+          <a:fillRef idx="0">
+            <a:schemeClr val="accent1"/>
+          </a:fillRef>
+          <a:effectRef idx="0">
+            <a:schemeClr val="accent1"/>
+          </a:effectRef>
+          <a:fontRef idx="minor">
+            <a:schemeClr val="tx1"/>
+          </a:fontRef>
+        </p:style>
+      </p:cxnSp>
+      <p:sp>
+        <p:nvSpPr>
+          <p:cNvPr id="22" name="TextBox 21"/>
+          <p:cNvSpPr txBox="1"/>
+          <p:nvPr/>
+        </p:nvSpPr>
+        <p:spPr>
+          <a:xfrm>
+            <a:off x="6383999" y="5598000"/>
+            <a:ext cx="2867999" cy="342000"/>
+          </a:xfrm>
+          <a:prstGeom prst="rect">
+            <a:avLst/>
+          </a:prstGeom>
+          <a:noFill/>
+        </p:spPr>
+        <p:txBody>
+          <a:bodyPr wrap="square" anchor="ctr" lIns="36000" rIns="36000" tIns="18000" bIns="18000">
+            <a:spAutoFit/>
+          </a:bodyPr>
+          <a:lstStyle/>
+          <a:p>
+            <a:pPr algn="ctr">
+              <a:lnSpc>
+                <a:spcPct val="110000"/>
+              </a:lnSpc>
+              <a:spcAft>
+                <a:spcPts val="0"/>
+              </a:spcAft>
+            </a:pPr>
+            <a:r>
+              <a:rPr sz="2000" b="1">
+                <a:solidFill>
+                  <a:srgbClr val="1F285A"/>
+                </a:solidFill>
+                <a:latin typeface="メイリオ"/>
+                <a:ea typeface="メイリオ"/>
+                <a:cs typeface="メイリオ"/>
+              </a:rPr>
+              <a:t>126%増</a:t>
+            </a:r>
+          </a:p>
+        </p:txBody>
+      </p:sp>
+      <p:sp>
+        <p:nvSpPr>
+          <p:cNvPr id="23" name="TextBox 22"/>
+          <p:cNvSpPr txBox="1"/>
+          <p:nvPr/>
+        </p:nvSpPr>
+        <p:spPr>
+          <a:xfrm>
+            <a:off x="6383999" y="5922000"/>
+            <a:ext cx="2867999" cy="342000"/>
+          </a:xfrm>
+          <a:prstGeom prst="rect">
+            <a:avLst/>
+          </a:prstGeom>
+          <a:noFill/>
+        </p:spPr>
+        <p:txBody>
+          <a:bodyPr wrap="square" anchor="t" lIns="36000" rIns="36000" tIns="18000" bIns="18000">
+            <a:spAutoFit/>
+          </a:bodyPr>
+          <a:lstStyle/>
+          <a:p>
+            <a:pPr algn="ctr">
+              <a:lnSpc>
+                <a:spcPct val="110000"/>
+              </a:lnSpc>
+              <a:spcAft>
+                <a:spcPts val="0"/>
+              </a:spcAft>
+            </a:pPr>
+            <a:r>
+              <a:rPr sz="950" b="0">
+                <a:solidFill>
+                  <a:srgbClr val="333333"/>
+                </a:solidFill>
+                <a:latin typeface="メイリオ"/>
+                <a:ea typeface="メイリオ"/>
+                <a:cs typeface="メイリオ"/>
+              </a:rPr>
+              <a:t>LINE経由の</a:t>
+            </a:r>
+          </a:p>
+          <a:p>
+            <a:pPr algn="ctr">
+              <a:lnSpc>
+                <a:spcPct val="110000"/>
+              </a:lnSpc>
+              <a:spcAft>
+                <a:spcPts val="0"/>
+              </a:spcAft>
+            </a:pPr>
+            <a:r>
+              <a:rPr sz="950" b="0">
+                <a:solidFill>
+                  <a:srgbClr val="333333"/>
+                </a:solidFill>
+                <a:latin typeface="メイリオ"/>
+                <a:ea typeface="メイリオ"/>
+                <a:cs typeface="メイリオ"/>
+              </a:rPr>
+              <a:t>ECサイトの売上</a:t>
+            </a:r>
+          </a:p>
+        </p:txBody>
+      </p:sp>
+      <p:cxnSp>
+        <p:nvCxnSpPr>
+          <p:cNvPr id="24" name="Connector 23"/>
+          <p:cNvCxnSpPr/>
+          <p:nvPr/>
+        </p:nvCxnSpPr>
+        <p:spPr>
+          <a:xfrm>
+            <a:off x="6383999" y="5670000"/>
+            <a:ext cx="0" cy="503999"/>
+          </a:xfrm>
+          <a:prstGeom prst="line">
+            <a:avLst/>
+          </a:prstGeom>
+          <a:ln w="9525">
+            <a:solidFill>
+              <a:srgbClr val="D9D9D9"/>
+            </a:solidFill>
+          </a:ln>
+        </p:spPr>
+        <p:style>
+          <a:lnRef idx="2">
+            <a:schemeClr val="accent1"/>
+          </a:lnRef>
+          <a:fillRef idx="0">
+            <a:schemeClr val="accent1"/>
+          </a:fillRef>
+          <a:effectRef idx="0">
+            <a:schemeClr val="accent1"/>
+          </a:effectRef>
+          <a:fontRef idx="minor">
+            <a:schemeClr val="tx1"/>
+          </a:fontRef>
+        </p:style>
+      </p:cxnSp>
+      <p:sp>
+        <p:nvSpPr>
+          <p:cNvPr id="25" name="TextBox 24"/>
+          <p:cNvSpPr txBox="1"/>
+          <p:nvPr/>
+        </p:nvSpPr>
+        <p:spPr>
+          <a:xfrm>
+            <a:off x="648000" y="6300000"/>
+            <a:ext cx="8604000" cy="180000"/>
+          </a:xfrm>
+          <a:prstGeom prst="rect">
+            <a:avLst/>
+          </a:prstGeom>
+          <a:noFill/>
+        </p:spPr>
+        <p:txBody>
+          <a:bodyPr wrap="square" anchor="t" lIns="36000" rIns="36000" tIns="18000" bIns="18000">
+            <a:spAutoFit/>
+          </a:bodyPr>
+          <a:lstStyle/>
+          <a:p>
+            <a:pPr algn="l">
+              <a:lnSpc>
+                <a:spcPct val="110000"/>
+              </a:lnSpc>
+              <a:spcAft>
+                <a:spcPts val="0"/>
+              </a:spcAft>
+            </a:pPr>
+            <a:r>
+              <a:rPr sz="850" b="0">
+                <a:solidFill>
+                  <a:srgbClr val="7F7F7F"/>
+                </a:solidFill>
+                <a:latin typeface="メイリオ"/>
+                <a:ea typeface="メイリオ"/>
+                <a:cs typeface="メイリオ"/>
+              </a:rPr>
+              <a:t>※導入前後の3か月平均の比較</a:t>
             </a:r>
           </a:p>
         </p:txBody>

--- a/20261027_LINEログイン・Profile+のご提案ver1.0.pptx
+++ b/20261027_LINEログイン・Profile+のご提案ver1.0.pptx
@@ -6173,9 +6173,8 @@
           </a:solidFill>
           <a:ln w="12700">
             <a:solidFill>
-              <a:srgbClr val="7F7F7F"/>
+              <a:srgbClr val="D9D9D9"/>
             </a:solidFill>
-            <a:prstDash val="dash"/>
           </a:ln>
           <a:effectLst/>
         </p:spPr>
@@ -6203,25 +6202,111 @@
       </p:sp>
       <p:sp>
         <p:nvSpPr>
-          <p:cNvPr id="15" name="Rectangle 14"/>
+          <p:cNvPr id="15" name="TextBox 14"/>
+          <p:cNvSpPr txBox="1"/>
+          <p:nvPr/>
+        </p:nvSpPr>
+        <p:spPr>
+          <a:xfrm>
+            <a:off x="6156000" y="2142000"/>
+            <a:ext cx="2916000" cy="720000"/>
+          </a:xfrm>
+          <a:prstGeom prst="rect">
+            <a:avLst/>
+          </a:prstGeom>
+          <a:noFill/>
+        </p:spPr>
+        <p:txBody>
+          <a:bodyPr wrap="square" anchor="b" lIns="36000" rIns="36000" tIns="18000" bIns="18000">
+            <a:spAutoFit/>
+          </a:bodyPr>
+          <a:lstStyle/>
+          <a:p>
+            <a:pPr algn="ctr">
+              <a:lnSpc>
+                <a:spcPct val="110000"/>
+              </a:lnSpc>
+              <a:spcAft>
+                <a:spcPts val="400"/>
+              </a:spcAft>
+            </a:pPr>
+            <a:r>
+              <a:rPr sz="1200" b="1">
+                <a:solidFill>
+                  <a:srgbClr val="1F285A"/>
+                </a:solidFill>
+                <a:latin typeface="メイリオ"/>
+                <a:ea typeface="メイリオ"/>
+                <a:cs typeface="メイリオ"/>
+              </a:rPr>
+              <a:t>体験デモ（LINEログイン）</a:t>
+            </a:r>
+          </a:p>
+          <a:p>
+            <a:pPr algn="ctr">
+              <a:lnSpc>
+                <a:spcPct val="110000"/>
+              </a:lnSpc>
+              <a:spcAft>
+                <a:spcPts val="0"/>
+              </a:spcAft>
+            </a:pPr>
+            <a:r>
+              <a:rPr sz="1050" b="0">
+                <a:solidFill>
+                  <a:srgbClr val="333333"/>
+                </a:solidFill>
+                <a:latin typeface="メイリオ"/>
+                <a:ea typeface="メイリオ"/>
+                <a:cs typeface="メイリオ"/>
+              </a:rPr>
+              <a:t>画面を操作しながら、</a:t>
+            </a:r>
+          </a:p>
+          <a:p>
+            <a:pPr algn="ctr">
+              <a:lnSpc>
+                <a:spcPct val="110000"/>
+              </a:lnSpc>
+              <a:spcAft>
+                <a:spcPts val="0"/>
+              </a:spcAft>
+            </a:pPr>
+            <a:r>
+              <a:rPr sz="1050" b="0">
+                <a:solidFill>
+                  <a:srgbClr val="333333"/>
+                </a:solidFill>
+                <a:latin typeface="メイリオ"/>
+                <a:ea typeface="メイリオ"/>
+                <a:cs typeface="メイリオ"/>
+              </a:rPr>
+              <a:t>仕組みを確認できる</a:t>
+            </a:r>
+          </a:p>
+        </p:txBody>
+      </p:sp>
+      <p:sp>
+        <p:nvSpPr>
+          <p:cNvPr id="16" name="Rounded Rectangle 15"/>
           <p:cNvSpPr/>
           <p:nvPr/>
         </p:nvSpPr>
         <p:spPr>
           <a:xfrm>
-            <a:off x="6120000" y="2394000"/>
-            <a:ext cx="936000" cy="936000"/>
-          </a:xfrm>
-          <a:prstGeom prst="rect">
-            <a:avLst/>
+            <a:off x="6408000" y="3006000"/>
+            <a:ext cx="2411999" cy="468000"/>
+          </a:xfrm>
+          <a:prstGeom prst="roundRect">
+            <a:avLst>
+              <a:gd name="adj" fmla="val 30000"/>
+            </a:avLst>
           </a:prstGeom>
           <a:solidFill>
-            <a:srgbClr val="F2F2F2"/>
+            <a:srgbClr val="1F285A"/>
           </a:solidFill>
-          <a:ln w="9525">
-            <a:solidFill>
-              <a:srgbClr val="D9D9D9"/>
-            </a:solidFill>
+          <a:ln>
+            <a:noFill/>
           </a:ln>
           <a:effectLst/>
         </p:spPr>
@@ -6252,101 +6337,15 @@
               </a:spcAft>
             </a:pPr>
             <a:r>
-              <a:rPr sz="900" b="0">
-                <a:solidFill>
-                  <a:srgbClr val="7F7F7F"/>
+              <a:rPr sz="1200" b="1">
+                <a:solidFill>
+                  <a:srgbClr val="FFFFFF"/>
                 </a:solidFill>
                 <a:latin typeface="メイリオ"/>
                 <a:ea typeface="メイリオ"/>
                 <a:cs typeface="メイリオ"/>
               </a:rPr>
-              <a:t>QRコード</a:t>
-            </a:r>
-          </a:p>
-        </p:txBody>
-      </p:sp>
-      <p:sp>
-        <p:nvSpPr>
-          <p:cNvPr id="16" name="TextBox 15"/>
-          <p:cNvSpPr txBox="1"/>
-          <p:nvPr/>
-        </p:nvSpPr>
-        <p:spPr>
-          <a:xfrm>
-            <a:off x="7164000" y="2466000"/>
-            <a:ext cx="1980000" cy="792000"/>
-          </a:xfrm>
-          <a:prstGeom prst="rect">
-            <a:avLst/>
-          </a:prstGeom>
-          <a:noFill/>
-        </p:spPr>
-        <p:txBody>
-          <a:bodyPr wrap="square" anchor="ctr" lIns="36000" rIns="36000" tIns="18000" bIns="18000">
-            <a:spAutoFit/>
-          </a:bodyPr>
-          <a:lstStyle/>
-          <a:p>
-            <a:pPr algn="l">
-              <a:lnSpc>
-                <a:spcPct val="110000"/>
-              </a:lnSpc>
-              <a:spcAft>
-                <a:spcPts val="200"/>
-              </a:spcAft>
-            </a:pPr>
-            <a:r>
-              <a:rPr sz="1100" b="1">
-                <a:solidFill>
-                  <a:srgbClr val="1F285A"/>
-                </a:solidFill>
-                <a:latin typeface="メイリオ"/>
-                <a:ea typeface="メイリオ"/>
-                <a:cs typeface="メイリオ"/>
-              </a:rPr>
-              <a:t>デモ動画（LINEログイン・友だち追加）</a:t>
-            </a:r>
-          </a:p>
-          <a:p>
-            <a:pPr algn="l">
-              <a:lnSpc>
-                <a:spcPct val="110000"/>
-              </a:lnSpc>
-              <a:spcAft>
-                <a:spcPts val="0"/>
-              </a:spcAft>
-            </a:pPr>
-            <a:r>
-              <a:rPr sz="1000" b="0">
-                <a:solidFill>
-                  <a:srgbClr val="333333"/>
-                </a:solidFill>
-                <a:latin typeface="メイリオ"/>
-                <a:ea typeface="メイリオ"/>
-                <a:cs typeface="メイリオ"/>
-              </a:rPr>
-              <a:t>QRコードを読み取って</a:t>
-            </a:r>
-          </a:p>
-          <a:p>
-            <a:pPr algn="l">
-              <a:lnSpc>
-                <a:spcPct val="110000"/>
-              </a:lnSpc>
-              <a:spcAft>
-                <a:spcPts val="0"/>
-              </a:spcAft>
-            </a:pPr>
-            <a:r>
-              <a:rPr sz="1000" b="0">
-                <a:solidFill>
-                  <a:srgbClr val="333333"/>
-                </a:solidFill>
-                <a:latin typeface="メイリオ"/>
-                <a:ea typeface="メイリオ"/>
-                <a:cs typeface="メイリオ"/>
-              </a:rPr>
-              <a:t>動画を見る</a:t>
+              <a:t>体験デモを開く　▶</a:t>
             </a:r>
           </a:p>
         </p:txBody>
@@ -9376,9 +9375,8 @@
           </a:solidFill>
           <a:ln w="12700">
             <a:solidFill>
-              <a:srgbClr val="7F7F7F"/>
+              <a:srgbClr val="D9D9D9"/>
             </a:solidFill>
-            <a:prstDash val="dash"/>
           </a:ln>
           <a:effectLst/>
         </p:spPr>
@@ -9406,25 +9404,111 @@
       </p:sp>
       <p:sp>
         <p:nvSpPr>
-          <p:cNvPr id="19" name="Rectangle 18"/>
+          <p:cNvPr id="19" name="TextBox 18"/>
+          <p:cNvSpPr txBox="1"/>
+          <p:nvPr/>
+        </p:nvSpPr>
+        <p:spPr>
+          <a:xfrm>
+            <a:off x="6156000" y="2826000"/>
+            <a:ext cx="2916000" cy="720000"/>
+          </a:xfrm>
+          <a:prstGeom prst="rect">
+            <a:avLst/>
+          </a:prstGeom>
+          <a:noFill/>
+        </p:spPr>
+        <p:txBody>
+          <a:bodyPr wrap="square" anchor="b" lIns="36000" rIns="36000" tIns="18000" bIns="18000">
+            <a:spAutoFit/>
+          </a:bodyPr>
+          <a:lstStyle/>
+          <a:p>
+            <a:pPr algn="ctr">
+              <a:lnSpc>
+                <a:spcPct val="110000"/>
+              </a:lnSpc>
+              <a:spcAft>
+                <a:spcPts val="400"/>
+              </a:spcAft>
+            </a:pPr>
+            <a:r>
+              <a:rPr sz="1200" b="1">
+                <a:solidFill>
+                  <a:srgbClr val="1F285A"/>
+                </a:solidFill>
+                <a:latin typeface="メイリオ"/>
+                <a:ea typeface="メイリオ"/>
+                <a:cs typeface="メイリオ"/>
+              </a:rPr>
+              <a:t>体験デモ（Profile+）</a:t>
+            </a:r>
+          </a:p>
+          <a:p>
+            <a:pPr algn="ctr">
+              <a:lnSpc>
+                <a:spcPct val="110000"/>
+              </a:lnSpc>
+              <a:spcAft>
+                <a:spcPts val="0"/>
+              </a:spcAft>
+            </a:pPr>
+            <a:r>
+              <a:rPr sz="1050" b="0">
+                <a:solidFill>
+                  <a:srgbClr val="333333"/>
+                </a:solidFill>
+                <a:latin typeface="メイリオ"/>
+                <a:ea typeface="メイリオ"/>
+                <a:cs typeface="メイリオ"/>
+              </a:rPr>
+              <a:t>画面を操作しながら、</a:t>
+            </a:r>
+          </a:p>
+          <a:p>
+            <a:pPr algn="ctr">
+              <a:lnSpc>
+                <a:spcPct val="110000"/>
+              </a:lnSpc>
+              <a:spcAft>
+                <a:spcPts val="0"/>
+              </a:spcAft>
+            </a:pPr>
+            <a:r>
+              <a:rPr sz="1050" b="0">
+                <a:solidFill>
+                  <a:srgbClr val="333333"/>
+                </a:solidFill>
+                <a:latin typeface="メイリオ"/>
+                <a:ea typeface="メイリオ"/>
+                <a:cs typeface="メイリオ"/>
+              </a:rPr>
+              <a:t>仕組みを確認できる</a:t>
+            </a:r>
+          </a:p>
+        </p:txBody>
+      </p:sp>
+      <p:sp>
+        <p:nvSpPr>
+          <p:cNvPr id="20" name="Rounded Rectangle 19"/>
           <p:cNvSpPr/>
           <p:nvPr/>
         </p:nvSpPr>
         <p:spPr>
           <a:xfrm>
-            <a:off x="6120000" y="3078000"/>
-            <a:ext cx="936000" cy="936000"/>
-          </a:xfrm>
-          <a:prstGeom prst="rect">
-            <a:avLst/>
+            <a:off x="6408000" y="3690000"/>
+            <a:ext cx="2411999" cy="468000"/>
+          </a:xfrm>
+          <a:prstGeom prst="roundRect">
+            <a:avLst>
+              <a:gd name="adj" fmla="val 30000"/>
+            </a:avLst>
           </a:prstGeom>
           <a:solidFill>
-            <a:srgbClr val="F2F2F2"/>
+            <a:srgbClr val="1F285A"/>
           </a:solidFill>
-          <a:ln w="9525">
-            <a:solidFill>
-              <a:srgbClr val="D9D9D9"/>
-            </a:solidFill>
+          <a:ln>
+            <a:noFill/>
           </a:ln>
           <a:effectLst/>
         </p:spPr>
@@ -9455,101 +9539,15 @@
               </a:spcAft>
             </a:pPr>
             <a:r>
-              <a:rPr sz="900" b="0">
-                <a:solidFill>
-                  <a:srgbClr val="7F7F7F"/>
+              <a:rPr sz="1200" b="1">
+                <a:solidFill>
+                  <a:srgbClr val="FFFFFF"/>
                 </a:solidFill>
                 <a:latin typeface="メイリオ"/>
                 <a:ea typeface="メイリオ"/>
                 <a:cs typeface="メイリオ"/>
               </a:rPr>
-              <a:t>QRコード</a:t>
-            </a:r>
-          </a:p>
-        </p:txBody>
-      </p:sp>
-      <p:sp>
-        <p:nvSpPr>
-          <p:cNvPr id="20" name="TextBox 19"/>
-          <p:cNvSpPr txBox="1"/>
-          <p:nvPr/>
-        </p:nvSpPr>
-        <p:spPr>
-          <a:xfrm>
-            <a:off x="7164000" y="3150000"/>
-            <a:ext cx="1980000" cy="792000"/>
-          </a:xfrm>
-          <a:prstGeom prst="rect">
-            <a:avLst/>
-          </a:prstGeom>
-          <a:noFill/>
-        </p:spPr>
-        <p:txBody>
-          <a:bodyPr wrap="square" anchor="ctr" lIns="36000" rIns="36000" tIns="18000" bIns="18000">
-            <a:spAutoFit/>
-          </a:bodyPr>
-          <a:lstStyle/>
-          <a:p>
-            <a:pPr algn="l">
-              <a:lnSpc>
-                <a:spcPct val="110000"/>
-              </a:lnSpc>
-              <a:spcAft>
-                <a:spcPts val="200"/>
-              </a:spcAft>
-            </a:pPr>
-            <a:r>
-              <a:rPr sz="1100" b="1">
-                <a:solidFill>
-                  <a:srgbClr val="1F285A"/>
-                </a:solidFill>
-                <a:latin typeface="メイリオ"/>
-                <a:ea typeface="メイリオ"/>
-                <a:cs typeface="メイリオ"/>
-              </a:rPr>
-              <a:t>デモ動画（Profile+）</a:t>
-            </a:r>
-          </a:p>
-          <a:p>
-            <a:pPr algn="l">
-              <a:lnSpc>
-                <a:spcPct val="110000"/>
-              </a:lnSpc>
-              <a:spcAft>
-                <a:spcPts val="0"/>
-              </a:spcAft>
-            </a:pPr>
-            <a:r>
-              <a:rPr sz="1000" b="0">
-                <a:solidFill>
-                  <a:srgbClr val="333333"/>
-                </a:solidFill>
-                <a:latin typeface="メイリオ"/>
-                <a:ea typeface="メイリオ"/>
-                <a:cs typeface="メイリオ"/>
-              </a:rPr>
-              <a:t>QRコードを読み取って</a:t>
-            </a:r>
-          </a:p>
-          <a:p>
-            <a:pPr algn="l">
-              <a:lnSpc>
-                <a:spcPct val="110000"/>
-              </a:lnSpc>
-              <a:spcAft>
-                <a:spcPts val="0"/>
-              </a:spcAft>
-            </a:pPr>
-            <a:r>
-              <a:rPr sz="1000" b="0">
-                <a:solidFill>
-                  <a:srgbClr val="333333"/>
-                </a:solidFill>
-                <a:latin typeface="メイリオ"/>
-                <a:ea typeface="メイリオ"/>
-                <a:cs typeface="メイリオ"/>
-              </a:rPr>
-              <a:t>動画を見る</a:t>
+              <a:t>体験デモを開く　▶</a:t>
             </a:r>
           </a:p>
         </p:txBody>

--- a/20261027_LINEログイン・Profile+のご提案ver1.0.pptx
+++ b/20261027_LINEログイン・Profile+のご提案ver1.0.pptx
@@ -6288,7 +6288,9 @@
       </p:sp>
       <p:sp>
         <p:nvSpPr>
-          <p:cNvPr id="16" name="Rounded Rectangle 15"/>
+          <p:cNvPr id="16" name="Rounded Rectangle 15">
+            <a:hlinkClick r:id="rId6"/>
+          </p:cNvPr>
           <p:cNvSpPr/>
           <p:nvPr/>
         </p:nvSpPr>
@@ -9490,7 +9492,9 @@
       </p:sp>
       <p:sp>
         <p:nvSpPr>
-          <p:cNvPr id="20" name="Rounded Rectangle 19"/>
+          <p:cNvPr id="20" name="Rounded Rectangle 19">
+            <a:hlinkClick r:id="rId6"/>
+          </p:cNvPr>
           <p:cNvSpPr/>
           <p:nvPr/>
         </p:nvSpPr>
